--- a/inst/extdata/hv_ppt_template_light.pptx
+++ b/inst/extdata/hv_ppt_template_light.pptx
@@ -874,522 +874,6 @@
     </a:lvl9pPr>
   </p:notesStyle>
 </p:notesMaster>
-</file>
-
-<file path=ppt/notesSlides/notesSlide1.xml><?xml version="1.0" encoding="utf-8"?>
-<p:notes xmlns:a="http://schemas.openxmlformats.org/drawingml/2006/main" xmlns:r="http://schemas.openxmlformats.org/officeDocument/2006/relationships" xmlns:p="http://schemas.openxmlformats.org/presentationml/2006/main">
-  <p:cSld>
-    <p:spTree>
-      <p:nvGrpSpPr>
-        <p:cNvPr id="1" name="">
-          <a:extLst>
-            <a:ext uri="{FF2B5EF4-FFF2-40B4-BE49-F238E27FC236}">
-              <a16:creationId xmlns:a16="http://schemas.microsoft.com/office/drawing/2014/main" id="{1C1BCC50-AFD3-7D30-1E79-137534D3A1A9}"/>
-            </a:ext>
-          </a:extLst>
-        </p:cNvPr>
-        <p:cNvGrpSpPr/>
-        <p:nvPr/>
-      </p:nvGrpSpPr>
-      <p:grpSpPr>
-        <a:xfrm>
-          <a:off x="0" y="0"/>
-          <a:ext cx="0" cy="0"/>
-          <a:chOff x="0" y="0"/>
-          <a:chExt cx="0" cy="0"/>
-        </a:xfrm>
-      </p:grpSpPr>
-      <p:sp>
-        <p:nvSpPr>
-          <p:cNvPr id="119810" name="Slide Image Placeholder 1">
-            <a:extLst>
-              <a:ext uri="{FF2B5EF4-FFF2-40B4-BE49-F238E27FC236}">
-                <a16:creationId xmlns:a16="http://schemas.microsoft.com/office/drawing/2014/main" id="{DB3D0C2A-6DC7-2185-E834-F43925828E99}"/>
-              </a:ext>
-            </a:extLst>
-          </p:cNvPr>
-          <p:cNvSpPr>
-            <a:spLocks noGrp="1" noRot="1" noChangeAspect="1" noTextEdit="1"/>
-          </p:cNvSpPr>
-          <p:nvPr>
-            <p:ph type="sldImg"/>
-          </p:nvPr>
-        </p:nvSpPr>
-        <p:spPr>
-          <a:xfrm>
-            <a:off x="381000" y="685800"/>
-            <a:ext cx="6096000" cy="3429000"/>
-          </a:xfrm>
-          <a:ln/>
-        </p:spPr>
-      </p:sp>
-      <p:sp>
-        <p:nvSpPr>
-          <p:cNvPr id="119811" name="Notes Placeholder 2">
-            <a:extLst>
-              <a:ext uri="{FF2B5EF4-FFF2-40B4-BE49-F238E27FC236}">
-                <a16:creationId xmlns:a16="http://schemas.microsoft.com/office/drawing/2014/main" id="{87B86351-C11A-4A3D-56A0-EE6FA8933985}"/>
-              </a:ext>
-            </a:extLst>
-          </p:cNvPr>
-          <p:cNvSpPr>
-            <a:spLocks noGrp="1"/>
-          </p:cNvSpPr>
-          <p:nvPr>
-            <p:ph type="body" idx="1"/>
-          </p:nvPr>
-        </p:nvSpPr>
-        <p:spPr>
-          <a:noFill/>
-          <a:ln/>
-          <a:extLst>
-            <a:ext uri="{909E8E84-426E-40DD-AFC4-6F175D3DCCD1}">
-              <a14:hiddenFill xmlns:a14="http://schemas.microsoft.com/office/drawing/2010/main">
-                <a:solidFill>
-                  <a:srgbClr val="FFFFFF"/>
-                </a:solidFill>
-              </a14:hiddenFill>
-            </a:ext>
-            <a:ext uri="{91240B29-F687-4F45-9708-019B960494DF}">
-              <a14:hiddenLine xmlns:a14="http://schemas.microsoft.com/office/drawing/2010/main" w="9525">
-                <a:solidFill>
-                  <a:srgbClr val="000000"/>
-                </a:solidFill>
-                <a:miter lim="800000"/>
-                <a:headEnd/>
-                <a:tailEnd/>
-              </a14:hiddenLine>
-            </a:ext>
-          </a:extLst>
-        </p:spPr>
-        <p:txBody>
-          <a:bodyPr/>
-          <a:lstStyle/>
-          <a:p>
-            <a:pPr eaLnBrk="1" hangingPunct="1"/>
-            <a:endParaRPr lang="en-US" altLang="en-US"/>
-          </a:p>
-        </p:txBody>
-      </p:sp>
-      <p:sp>
-        <p:nvSpPr>
-          <p:cNvPr id="119812" name="Slide Number Placeholder 3">
-            <a:extLst>
-              <a:ext uri="{FF2B5EF4-FFF2-40B4-BE49-F238E27FC236}">
-                <a16:creationId xmlns:a16="http://schemas.microsoft.com/office/drawing/2014/main" id="{BA6CB3D1-4CC3-C5DC-2E6B-5E4A984D2E9B}"/>
-              </a:ext>
-            </a:extLst>
-          </p:cNvPr>
-          <p:cNvSpPr>
-            <a:spLocks noGrp="1"/>
-          </p:cNvSpPr>
-          <p:nvPr>
-            <p:ph type="sldNum" sz="quarter" idx="5"/>
-          </p:nvPr>
-        </p:nvSpPr>
-        <p:spPr>
-          <a:noFill/>
-          <a:ln/>
-          <a:extLst>
-            <a:ext uri="{909E8E84-426E-40DD-AFC4-6F175D3DCCD1}">
-              <a14:hiddenFill xmlns:a14="http://schemas.microsoft.com/office/drawing/2010/main">
-                <a:solidFill>
-                  <a:srgbClr val="FFFFFF"/>
-                </a:solidFill>
-              </a14:hiddenFill>
-            </a:ext>
-            <a:ext uri="{91240B29-F687-4F45-9708-019B960494DF}">
-              <a14:hiddenLine xmlns:a14="http://schemas.microsoft.com/office/drawing/2010/main" w="9525">
-                <a:solidFill>
-                  <a:srgbClr val="000000"/>
-                </a:solidFill>
-                <a:miter lim="800000"/>
-                <a:headEnd/>
-                <a:tailEnd/>
-              </a14:hiddenLine>
-            </a:ext>
-          </a:extLst>
-        </p:spPr>
-        <p:txBody>
-          <a:bodyPr/>
-          <a:lstStyle>
-            <a:lvl1pPr eaLnBrk="0" hangingPunct="0">
-              <a:defRPr sz="2400">
-                <a:solidFill>
-                  <a:schemeClr val="tx1"/>
-                </a:solidFill>
-                <a:latin typeface="Arial" panose="020B0604020202020204" pitchFamily="34" charset="0"/>
-              </a:defRPr>
-            </a:lvl1pPr>
-            <a:lvl2pPr marL="742950" indent="-285750" eaLnBrk="0" hangingPunct="0">
-              <a:defRPr sz="2400">
-                <a:solidFill>
-                  <a:schemeClr val="tx1"/>
-                </a:solidFill>
-                <a:latin typeface="Arial" panose="020B0604020202020204" pitchFamily="34" charset="0"/>
-              </a:defRPr>
-            </a:lvl2pPr>
-            <a:lvl3pPr marL="1143000" indent="-228600" eaLnBrk="0" hangingPunct="0">
-              <a:defRPr sz="2400">
-                <a:solidFill>
-                  <a:schemeClr val="tx1"/>
-                </a:solidFill>
-                <a:latin typeface="Arial" panose="020B0604020202020204" pitchFamily="34" charset="0"/>
-              </a:defRPr>
-            </a:lvl3pPr>
-            <a:lvl4pPr marL="1600200" indent="-228600" eaLnBrk="0" hangingPunct="0">
-              <a:defRPr sz="2400">
-                <a:solidFill>
-                  <a:schemeClr val="tx1"/>
-                </a:solidFill>
-                <a:latin typeface="Arial" panose="020B0604020202020204" pitchFamily="34" charset="0"/>
-              </a:defRPr>
-            </a:lvl4pPr>
-            <a:lvl5pPr marL="2057400" indent="-228600" eaLnBrk="0" hangingPunct="0">
-              <a:defRPr sz="2400">
-                <a:solidFill>
-                  <a:schemeClr val="tx1"/>
-                </a:solidFill>
-                <a:latin typeface="Arial" panose="020B0604020202020204" pitchFamily="34" charset="0"/>
-              </a:defRPr>
-            </a:lvl5pPr>
-            <a:lvl6pPr marL="2514600" indent="-228600" eaLnBrk="0" fontAlgn="base" hangingPunct="0">
-              <a:spcBef>
-                <a:spcPct val="0"/>
-              </a:spcBef>
-              <a:spcAft>
-                <a:spcPct val="0"/>
-              </a:spcAft>
-              <a:defRPr sz="2400">
-                <a:solidFill>
-                  <a:schemeClr val="tx1"/>
-                </a:solidFill>
-                <a:latin typeface="Arial" panose="020B0604020202020204" pitchFamily="34" charset="0"/>
-              </a:defRPr>
-            </a:lvl6pPr>
-            <a:lvl7pPr marL="2971800" indent="-228600" eaLnBrk="0" fontAlgn="base" hangingPunct="0">
-              <a:spcBef>
-                <a:spcPct val="0"/>
-              </a:spcBef>
-              <a:spcAft>
-                <a:spcPct val="0"/>
-              </a:spcAft>
-              <a:defRPr sz="2400">
-                <a:solidFill>
-                  <a:schemeClr val="tx1"/>
-                </a:solidFill>
-                <a:latin typeface="Arial" panose="020B0604020202020204" pitchFamily="34" charset="0"/>
-              </a:defRPr>
-            </a:lvl7pPr>
-            <a:lvl8pPr marL="3429000" indent="-228600" eaLnBrk="0" fontAlgn="base" hangingPunct="0">
-              <a:spcBef>
-                <a:spcPct val="0"/>
-              </a:spcBef>
-              <a:spcAft>
-                <a:spcPct val="0"/>
-              </a:spcAft>
-              <a:defRPr sz="2400">
-                <a:solidFill>
-                  <a:schemeClr val="tx1"/>
-                </a:solidFill>
-                <a:latin typeface="Arial" panose="020B0604020202020204" pitchFamily="34" charset="0"/>
-              </a:defRPr>
-            </a:lvl8pPr>
-            <a:lvl9pPr marL="3886200" indent="-228600" eaLnBrk="0" fontAlgn="base" hangingPunct="0">
-              <a:spcBef>
-                <a:spcPct val="0"/>
-              </a:spcBef>
-              <a:spcAft>
-                <a:spcPct val="0"/>
-              </a:spcAft>
-              <a:defRPr sz="2400">
-                <a:solidFill>
-                  <a:schemeClr val="tx1"/>
-                </a:solidFill>
-                <a:latin typeface="Arial" panose="020B0604020202020204" pitchFamily="34" charset="0"/>
-              </a:defRPr>
-            </a:lvl9pPr>
-          </a:lstStyle>
-          <a:p>
-            <a:pPr eaLnBrk="1" hangingPunct="1"/>
-            <a:fld id="{2518063F-41F1-4F1E-BB95-7C219CB0C674}" type="slidenum">
-              <a:rPr lang="en-US" altLang="en-US" sz="1200"/>
-              <a:pPr eaLnBrk="1" hangingPunct="1"/>
-              <a:t>3</a:t>
-            </a:fld>
-            <a:endParaRPr lang="en-US" altLang="en-US" sz="1200"/>
-          </a:p>
-        </p:txBody>
-      </p:sp>
-    </p:spTree>
-    <p:extLst>
-      <p:ext uri="{BB962C8B-B14F-4D97-AF65-F5344CB8AC3E}">
-        <p14:creationId xmlns:p14="http://schemas.microsoft.com/office/powerpoint/2010/main" val="393439252"/>
-      </p:ext>
-    </p:extLst>
-  </p:cSld>
-  <p:clrMapOvr>
-    <a:masterClrMapping/>
-  </p:clrMapOvr>
-</p:notes>
-</file>
-
-<file path=ppt/notesSlides/notesSlide2.xml><?xml version="1.0" encoding="utf-8"?>
-<p:notes xmlns:a="http://schemas.openxmlformats.org/drawingml/2006/main" xmlns:r="http://schemas.openxmlformats.org/officeDocument/2006/relationships" xmlns:p="http://schemas.openxmlformats.org/presentationml/2006/main">
-  <p:cSld>
-    <p:spTree>
-      <p:nvGrpSpPr>
-        <p:cNvPr id="1" name="">
-          <a:extLst>
-            <a:ext uri="{FF2B5EF4-FFF2-40B4-BE49-F238E27FC236}">
-              <a16:creationId xmlns:a16="http://schemas.microsoft.com/office/drawing/2014/main" id="{7D1CC118-4DC8-2022-62FE-66E80A51B4A7}"/>
-            </a:ext>
-          </a:extLst>
-        </p:cNvPr>
-        <p:cNvGrpSpPr/>
-        <p:nvPr/>
-      </p:nvGrpSpPr>
-      <p:grpSpPr>
-        <a:xfrm>
-          <a:off x="0" y="0"/>
-          <a:ext cx="0" cy="0"/>
-          <a:chOff x="0" y="0"/>
-          <a:chExt cx="0" cy="0"/>
-        </a:xfrm>
-      </p:grpSpPr>
-      <p:sp>
-        <p:nvSpPr>
-          <p:cNvPr id="145410" name="Slide Image Placeholder 1">
-            <a:extLst>
-              <a:ext uri="{FF2B5EF4-FFF2-40B4-BE49-F238E27FC236}">
-                <a16:creationId xmlns:a16="http://schemas.microsoft.com/office/drawing/2014/main" id="{0064928D-C517-5DA0-9CA5-8DE6CAB89805}"/>
-              </a:ext>
-            </a:extLst>
-          </p:cNvPr>
-          <p:cNvSpPr>
-            <a:spLocks noGrp="1" noRot="1" noChangeAspect="1" noTextEdit="1"/>
-          </p:cNvSpPr>
-          <p:nvPr>
-            <p:ph type="sldImg"/>
-          </p:nvPr>
-        </p:nvSpPr>
-        <p:spPr>
-          <a:xfrm>
-            <a:off x="381000" y="685800"/>
-            <a:ext cx="6096000" cy="3429000"/>
-          </a:xfrm>
-          <a:ln/>
-        </p:spPr>
-      </p:sp>
-      <p:sp>
-        <p:nvSpPr>
-          <p:cNvPr id="145411" name="Notes Placeholder 2">
-            <a:extLst>
-              <a:ext uri="{FF2B5EF4-FFF2-40B4-BE49-F238E27FC236}">
-                <a16:creationId xmlns:a16="http://schemas.microsoft.com/office/drawing/2014/main" id="{E5DE981B-094A-5328-3DD7-6BF8B5A025D3}"/>
-              </a:ext>
-            </a:extLst>
-          </p:cNvPr>
-          <p:cNvSpPr>
-            <a:spLocks noGrp="1"/>
-          </p:cNvSpPr>
-          <p:nvPr>
-            <p:ph type="body" idx="1"/>
-          </p:nvPr>
-        </p:nvSpPr>
-        <p:spPr>
-          <a:noFill/>
-          <a:ln/>
-          <a:extLst>
-            <a:ext uri="{909E8E84-426E-40DD-AFC4-6F175D3DCCD1}">
-              <a14:hiddenFill xmlns:a14="http://schemas.microsoft.com/office/drawing/2010/main">
-                <a:solidFill>
-                  <a:srgbClr val="FFFFFF"/>
-                </a:solidFill>
-              </a14:hiddenFill>
-            </a:ext>
-            <a:ext uri="{91240B29-F687-4F45-9708-019B960494DF}">
-              <a14:hiddenLine xmlns:a14="http://schemas.microsoft.com/office/drawing/2010/main" w="9525">
-                <a:solidFill>
-                  <a:srgbClr val="000000"/>
-                </a:solidFill>
-                <a:miter lim="800000"/>
-                <a:headEnd/>
-                <a:tailEnd/>
-              </a14:hiddenLine>
-            </a:ext>
-          </a:extLst>
-        </p:spPr>
-        <p:txBody>
-          <a:bodyPr/>
-          <a:lstStyle/>
-          <a:p>
-            <a:pPr eaLnBrk="1" hangingPunct="1"/>
-            <a:endParaRPr lang="en-US" altLang="en-US"/>
-          </a:p>
-        </p:txBody>
-      </p:sp>
-      <p:sp>
-        <p:nvSpPr>
-          <p:cNvPr id="145412" name="Slide Number Placeholder 3">
-            <a:extLst>
-              <a:ext uri="{FF2B5EF4-FFF2-40B4-BE49-F238E27FC236}">
-                <a16:creationId xmlns:a16="http://schemas.microsoft.com/office/drawing/2014/main" id="{0F8B414B-6E89-08CB-E487-54A98CD13476}"/>
-              </a:ext>
-            </a:extLst>
-          </p:cNvPr>
-          <p:cNvSpPr>
-            <a:spLocks noGrp="1"/>
-          </p:cNvSpPr>
-          <p:nvPr>
-            <p:ph type="sldNum" sz="quarter" idx="5"/>
-          </p:nvPr>
-        </p:nvSpPr>
-        <p:spPr>
-          <a:noFill/>
-          <a:ln/>
-          <a:extLst>
-            <a:ext uri="{909E8E84-426E-40DD-AFC4-6F175D3DCCD1}">
-              <a14:hiddenFill xmlns:a14="http://schemas.microsoft.com/office/drawing/2010/main">
-                <a:solidFill>
-                  <a:srgbClr val="FFFFFF"/>
-                </a:solidFill>
-              </a14:hiddenFill>
-            </a:ext>
-            <a:ext uri="{91240B29-F687-4F45-9708-019B960494DF}">
-              <a14:hiddenLine xmlns:a14="http://schemas.microsoft.com/office/drawing/2010/main" w="9525">
-                <a:solidFill>
-                  <a:srgbClr val="000000"/>
-                </a:solidFill>
-                <a:miter lim="800000"/>
-                <a:headEnd/>
-                <a:tailEnd/>
-              </a14:hiddenLine>
-            </a:ext>
-          </a:extLst>
-        </p:spPr>
-        <p:txBody>
-          <a:bodyPr/>
-          <a:lstStyle>
-            <a:lvl1pPr eaLnBrk="0" hangingPunct="0">
-              <a:defRPr sz="2400">
-                <a:solidFill>
-                  <a:schemeClr val="tx1"/>
-                </a:solidFill>
-                <a:latin typeface="Arial" panose="020B0604020202020204" pitchFamily="34" charset="0"/>
-              </a:defRPr>
-            </a:lvl1pPr>
-            <a:lvl2pPr marL="742950" indent="-285750" eaLnBrk="0" hangingPunct="0">
-              <a:defRPr sz="2400">
-                <a:solidFill>
-                  <a:schemeClr val="tx1"/>
-                </a:solidFill>
-                <a:latin typeface="Arial" panose="020B0604020202020204" pitchFamily="34" charset="0"/>
-              </a:defRPr>
-            </a:lvl2pPr>
-            <a:lvl3pPr marL="1143000" indent="-228600" eaLnBrk="0" hangingPunct="0">
-              <a:defRPr sz="2400">
-                <a:solidFill>
-                  <a:schemeClr val="tx1"/>
-                </a:solidFill>
-                <a:latin typeface="Arial" panose="020B0604020202020204" pitchFamily="34" charset="0"/>
-              </a:defRPr>
-            </a:lvl3pPr>
-            <a:lvl4pPr marL="1600200" indent="-228600" eaLnBrk="0" hangingPunct="0">
-              <a:defRPr sz="2400">
-                <a:solidFill>
-                  <a:schemeClr val="tx1"/>
-                </a:solidFill>
-                <a:latin typeface="Arial" panose="020B0604020202020204" pitchFamily="34" charset="0"/>
-              </a:defRPr>
-            </a:lvl4pPr>
-            <a:lvl5pPr marL="2057400" indent="-228600" eaLnBrk="0" hangingPunct="0">
-              <a:defRPr sz="2400">
-                <a:solidFill>
-                  <a:schemeClr val="tx1"/>
-                </a:solidFill>
-                <a:latin typeface="Arial" panose="020B0604020202020204" pitchFamily="34" charset="0"/>
-              </a:defRPr>
-            </a:lvl5pPr>
-            <a:lvl6pPr marL="2514600" indent="-228600" eaLnBrk="0" fontAlgn="base" hangingPunct="0">
-              <a:spcBef>
-                <a:spcPct val="0"/>
-              </a:spcBef>
-              <a:spcAft>
-                <a:spcPct val="0"/>
-              </a:spcAft>
-              <a:defRPr sz="2400">
-                <a:solidFill>
-                  <a:schemeClr val="tx1"/>
-                </a:solidFill>
-                <a:latin typeface="Arial" panose="020B0604020202020204" pitchFamily="34" charset="0"/>
-              </a:defRPr>
-            </a:lvl6pPr>
-            <a:lvl7pPr marL="2971800" indent="-228600" eaLnBrk="0" fontAlgn="base" hangingPunct="0">
-              <a:spcBef>
-                <a:spcPct val="0"/>
-              </a:spcBef>
-              <a:spcAft>
-                <a:spcPct val="0"/>
-              </a:spcAft>
-              <a:defRPr sz="2400">
-                <a:solidFill>
-                  <a:schemeClr val="tx1"/>
-                </a:solidFill>
-                <a:latin typeface="Arial" panose="020B0604020202020204" pitchFamily="34" charset="0"/>
-              </a:defRPr>
-            </a:lvl7pPr>
-            <a:lvl8pPr marL="3429000" indent="-228600" eaLnBrk="0" fontAlgn="base" hangingPunct="0">
-              <a:spcBef>
-                <a:spcPct val="0"/>
-              </a:spcBef>
-              <a:spcAft>
-                <a:spcPct val="0"/>
-              </a:spcAft>
-              <a:defRPr sz="2400">
-                <a:solidFill>
-                  <a:schemeClr val="tx1"/>
-                </a:solidFill>
-                <a:latin typeface="Arial" panose="020B0604020202020204" pitchFamily="34" charset="0"/>
-              </a:defRPr>
-            </a:lvl8pPr>
-            <a:lvl9pPr marL="3886200" indent="-228600" eaLnBrk="0" fontAlgn="base" hangingPunct="0">
-              <a:spcBef>
-                <a:spcPct val="0"/>
-              </a:spcBef>
-              <a:spcAft>
-                <a:spcPct val="0"/>
-              </a:spcAft>
-              <a:defRPr sz="2400">
-                <a:solidFill>
-                  <a:schemeClr val="tx1"/>
-                </a:solidFill>
-                <a:latin typeface="Arial" panose="020B0604020202020204" pitchFamily="34" charset="0"/>
-              </a:defRPr>
-            </a:lvl9pPr>
-          </a:lstStyle>
-          <a:p>
-            <a:pPr eaLnBrk="1" hangingPunct="1"/>
-            <a:fld id="{9096FE29-398B-408D-B001-6A099689385E}" type="slidenum">
-              <a:rPr lang="en-US" altLang="en-US" sz="1200"/>
-              <a:pPr eaLnBrk="1" hangingPunct="1"/>
-              <a:t>4</a:t>
-            </a:fld>
-            <a:endParaRPr lang="en-US" altLang="en-US" sz="1200"/>
-          </a:p>
-        </p:txBody>
-      </p:sp>
-    </p:spTree>
-    <p:extLst>
-      <p:ext uri="{BB962C8B-B14F-4D97-AF65-F5344CB8AC3E}">
-        <p14:creationId xmlns:p14="http://schemas.microsoft.com/office/powerpoint/2010/main" val="2544842076"/>
-      </p:ext>
-    </p:extLst>
-  </p:cSld>
-  <p:clrMapOvr>
-    <a:masterClrMapping/>
-  </p:clrMapOvr>
-</p:notes>
 </file>
 
 <file path=ppt/slideLayouts/slideLayout1.xml><?xml version="1.0" encoding="utf-8"?>

--- a/inst/extdata/hv_ppt_template_light.pptx
+++ b/inst/extdata/hv_ppt_template_light.pptx
@@ -878,7 +878,7 @@
 
 <file path=ppt/slideLayouts/slideLayout1.xml><?xml version="1.0" encoding="utf-8"?>
 <p:sldLayout xmlns:a="http://schemas.openxmlformats.org/drawingml/2006/main" xmlns:r="http://schemas.openxmlformats.org/officeDocument/2006/relationships" xmlns:p="http://schemas.openxmlformats.org/presentationml/2006/main" type="title" preserve="1">
-  <p:cSld name="1_Title Slide">
+  <p:cSld name="Title Slide">
     <p:spTree>
       <p:nvGrpSpPr>
         <p:cNvPr id="1" name=""/>
@@ -1506,7 +1506,7 @@
 
 <file path=ppt/slideLayouts/slideLayout2.xml><?xml version="1.0" encoding="utf-8"?>
 <p:sldLayout xmlns:a="http://schemas.openxmlformats.org/drawingml/2006/main" xmlns:r="http://schemas.openxmlformats.org/officeDocument/2006/relationships" xmlns:p="http://schemas.openxmlformats.org/presentationml/2006/main" preserve="1" userDrawn="1">
-  <p:cSld name="1_Custom Layout">
+  <p:cSld name="Section Header">
     <p:spTree>
       <p:nvGrpSpPr>
         <p:cNvPr id="1" name=""/>
@@ -1573,7 +1573,7 @@
 
 <file path=ppt/slideLayouts/slideLayout3.xml><?xml version="1.0" encoding="utf-8"?>
 <p:sldLayout xmlns:a="http://schemas.openxmlformats.org/drawingml/2006/main" xmlns:r="http://schemas.openxmlformats.org/officeDocument/2006/relationships" xmlns:p="http://schemas.openxmlformats.org/presentationml/2006/main" preserve="1" userDrawn="1">
-  <p:cSld name="Title Slide">
+  <p:cSld name="Title Slide Background">
     <p:spTree>
       <p:nvGrpSpPr>
         <p:cNvPr id="1" name=""/>
@@ -1985,7 +1985,7 @@
 
 <file path=ppt/slideLayouts/slideLayout6.xml><?xml version="1.0" encoding="utf-8"?>
 <p:sldLayout xmlns:a="http://schemas.openxmlformats.org/drawingml/2006/main" xmlns:r="http://schemas.openxmlformats.org/officeDocument/2006/relationships" xmlns:p="http://schemas.openxmlformats.org/presentationml/2006/main" preserve="1" userDrawn="1">
-  <p:cSld name="Custom Layout">
+  <p:cSld name="Title Only">
     <p:spTree>
       <p:nvGrpSpPr>
         <p:cNvPr id="1" name=""/>
